--- a/令和8年度第3回ケアマネ研修_予習スライド_成年後見制度.pptx
+++ b/令和8年度第3回ケアマネ研修_予習スライド_成年後見制度.pptx
@@ -6469,7 +6469,7 @@
         </p:nvSpPr>
         <p:spPr>
           <a:xfrm>
-            <a:off x="731520" y="2414016"/>
+            <a:off x="731520" y="2359152"/>
             <a:ext cx="7315200" cy="274320"/>
           </a:xfrm>
           <a:prstGeom prst="rect">
@@ -6512,8 +6512,8 @@
         </p:nvSpPr>
         <p:spPr>
           <a:xfrm>
-            <a:off x="731520" y="2724912"/>
-            <a:ext cx="1554480" cy="384048"/>
+            <a:off x="731520" y="2651760"/>
+            <a:ext cx="1554480" cy="365760"/>
           </a:xfrm>
           <a:prstGeom prst="rect">
             <a:avLst/>
@@ -6556,8 +6556,8 @@
         </p:nvSpPr>
         <p:spPr>
           <a:xfrm>
-            <a:off x="731520" y="2724912"/>
-            <a:ext cx="1554480" cy="384048"/>
+            <a:off x="731520" y="2651760"/>
+            <a:ext cx="1554480" cy="365760"/>
           </a:xfrm>
           <a:prstGeom prst="rect">
             <a:avLst/>
@@ -6586,7 +6586,7 @@
                 <a:latin typeface="Meiryo"/>
                 <a:ea typeface="Meiryo"/>
               </a:rPr>
-              <a:t>2025.6.10</a:t>
+              <a:t>2025.6</a:t>
             </a:r>
           </a:p>
         </p:txBody>
@@ -6599,8 +6599,8 @@
         </p:nvSpPr>
         <p:spPr>
           <a:xfrm>
-            <a:off x="2423160" y="2724912"/>
-            <a:ext cx="5486400" cy="384048"/>
+            <a:off x="2423160" y="2651760"/>
+            <a:ext cx="5577840" cy="365760"/>
           </a:xfrm>
           <a:prstGeom prst="rect">
             <a:avLst/>
@@ -6622,14 +6622,14 @@
               </a:spcAft>
             </a:pPr>
             <a:r>
-              <a:rPr sz="1100" b="0" i="0">
+              <a:rPr sz="1050" b="0" i="0">
                 <a:solidFill>
                   <a:srgbClr val="262B33"/>
                 </a:solidFill>
                 <a:latin typeface="Meiryo"/>
                 <a:ea typeface="Meiryo"/>
               </a:rPr>
-              <a:t>法制審議会が中間試案を公表（パブコメ実施）</a:t>
+              <a:t>法制審議会の部会が中間試案を取りまとめ（パブコメ実施）</a:t>
             </a:r>
           </a:p>
         </p:txBody>
@@ -6642,8 +6642,8 @@
         </p:nvSpPr>
         <p:spPr>
           <a:xfrm>
-            <a:off x="731520" y="3182112"/>
-            <a:ext cx="1554480" cy="384048"/>
+            <a:off x="731520" y="3072384"/>
+            <a:ext cx="1554480" cy="365760"/>
           </a:xfrm>
           <a:prstGeom prst="rect">
             <a:avLst/>
@@ -6686,8 +6686,8 @@
         </p:nvSpPr>
         <p:spPr>
           <a:xfrm>
-            <a:off x="731520" y="3182112"/>
-            <a:ext cx="1554480" cy="384048"/>
+            <a:off x="731520" y="3072384"/>
+            <a:ext cx="1554480" cy="365760"/>
           </a:xfrm>
           <a:prstGeom prst="rect">
             <a:avLst/>
@@ -6729,8 +6729,8 @@
         </p:nvSpPr>
         <p:spPr>
           <a:xfrm>
-            <a:off x="2423160" y="3182112"/>
-            <a:ext cx="5486400" cy="384048"/>
+            <a:off x="2423160" y="3072384"/>
+            <a:ext cx="5577840" cy="365760"/>
           </a:xfrm>
           <a:prstGeom prst="rect">
             <a:avLst/>
@@ -6752,7 +6752,7 @@
               </a:spcAft>
             </a:pPr>
             <a:r>
-              <a:rPr sz="1100" b="0" i="0">
+              <a:rPr sz="1050" b="0" i="0">
                 <a:solidFill>
                   <a:srgbClr val="262B33"/>
                 </a:solidFill>
@@ -6772,8 +6772,8 @@
         </p:nvSpPr>
         <p:spPr>
           <a:xfrm>
-            <a:off x="731520" y="3639312"/>
-            <a:ext cx="1554480" cy="384048"/>
+            <a:off x="731520" y="3493008"/>
+            <a:ext cx="1554480" cy="365760"/>
           </a:xfrm>
           <a:prstGeom prst="rect">
             <a:avLst/>
@@ -6816,8 +6816,8 @@
         </p:nvSpPr>
         <p:spPr>
           <a:xfrm>
-            <a:off x="731520" y="3639312"/>
-            <a:ext cx="1554480" cy="384048"/>
+            <a:off x="731520" y="3493008"/>
+            <a:ext cx="1554480" cy="365760"/>
           </a:xfrm>
           <a:prstGeom prst="rect">
             <a:avLst/>
@@ -6859,8 +6859,8 @@
         </p:nvSpPr>
         <p:spPr>
           <a:xfrm>
-            <a:off x="2423160" y="3639312"/>
-            <a:ext cx="5486400" cy="384048"/>
+            <a:off x="2423160" y="3493008"/>
+            <a:ext cx="5577840" cy="365760"/>
           </a:xfrm>
           <a:prstGeom prst="rect">
             <a:avLst/>
@@ -6882,7 +6882,7 @@
               </a:spcAft>
             </a:pPr>
             <a:r>
-              <a:rPr sz="1100" b="0" i="0">
+              <a:rPr sz="1050" b="0" i="0">
                 <a:solidFill>
                   <a:srgbClr val="262B33"/>
                 </a:solidFill>
@@ -6902,8 +6902,8 @@
         </p:nvSpPr>
         <p:spPr>
           <a:xfrm>
-            <a:off x="731520" y="4096512"/>
-            <a:ext cx="1554480" cy="384048"/>
+            <a:off x="731520" y="3913632"/>
+            <a:ext cx="1554480" cy="365760"/>
           </a:xfrm>
           <a:prstGeom prst="rect">
             <a:avLst/>
@@ -6946,8 +6946,8 @@
         </p:nvSpPr>
         <p:spPr>
           <a:xfrm>
-            <a:off x="731520" y="4096512"/>
-            <a:ext cx="1554480" cy="384048"/>
+            <a:off x="731520" y="3913632"/>
+            <a:ext cx="1554480" cy="365760"/>
           </a:xfrm>
           <a:prstGeom prst="rect">
             <a:avLst/>
@@ -6989,8 +6989,8 @@
         </p:nvSpPr>
         <p:spPr>
           <a:xfrm>
-            <a:off x="2423160" y="4096512"/>
-            <a:ext cx="5486400" cy="384048"/>
+            <a:off x="2423160" y="3913632"/>
+            <a:ext cx="5577840" cy="365760"/>
           </a:xfrm>
           <a:prstGeom prst="rect">
             <a:avLst/>
@@ -7012,7 +7012,7 @@
               </a:spcAft>
             </a:pPr>
             <a:r>
-              <a:rPr sz="1100" b="0" i="0">
+              <a:rPr sz="1050" b="0" i="0">
                 <a:solidFill>
                   <a:srgbClr val="262B33"/>
                 </a:solidFill>
@@ -7032,7 +7032,7 @@
         </p:nvSpPr>
         <p:spPr>
           <a:xfrm>
-            <a:off x="731520" y="4626864"/>
+            <a:off x="731520" y="4370832"/>
             <a:ext cx="7315200" cy="274320"/>
           </a:xfrm>
           <a:prstGeom prst="rect">
@@ -7075,7 +7075,7 @@
         </p:nvSpPr>
         <p:spPr>
           <a:xfrm>
-            <a:off x="731520" y="4983480"/>
+            <a:off x="731520" y="4736592"/>
             <a:ext cx="118872" cy="118872"/>
           </a:xfrm>
           <a:prstGeom prst="rect">
@@ -7119,8 +7119,8 @@
         </p:nvSpPr>
         <p:spPr>
           <a:xfrm>
-            <a:off x="960120" y="4937760"/>
-            <a:ext cx="6858000" cy="347472"/>
+            <a:off x="960120" y="4681728"/>
+            <a:ext cx="6903720" cy="420624"/>
           </a:xfrm>
           <a:prstGeom prst="rect">
             <a:avLst/>
@@ -7135,21 +7135,21 @@
           <a:p>
             <a:pPr algn="l">
               <a:lnSpc>
-                <a:spcPct val="115000"/>
+                <a:spcPct val="112000"/>
               </a:lnSpc>
               <a:spcAft>
                 <a:spcPts val="200"/>
               </a:spcAft>
             </a:pPr>
             <a:r>
-              <a:rPr sz="1100" b="0" i="0">
+              <a:rPr sz="1050" b="0" i="0">
                 <a:solidFill>
                   <a:srgbClr val="262B33"/>
                 </a:solidFill>
                 <a:latin typeface="Meiryo"/>
                 <a:ea typeface="Meiryo"/>
               </a:rPr>
-              <a:t>終身制の廃止 ── 家裁の判断で制度を「終われる後見」へ</a:t>
+              <a:t>終身制の廃止 ── 判断能力が回復しなくても、必要がなくなれば終了できる</a:t>
             </a:r>
           </a:p>
         </p:txBody>
@@ -7162,7 +7162,7 @@
         </p:nvSpPr>
         <p:spPr>
           <a:xfrm>
-            <a:off x="731520" y="5349240"/>
+            <a:off x="731520" y="5157216"/>
             <a:ext cx="118872" cy="118872"/>
           </a:xfrm>
           <a:prstGeom prst="rect">
@@ -7206,8 +7206,8 @@
         </p:nvSpPr>
         <p:spPr>
           <a:xfrm>
-            <a:off x="960120" y="5303520"/>
-            <a:ext cx="6858000" cy="347472"/>
+            <a:off x="960120" y="5102352"/>
+            <a:ext cx="6903720" cy="420624"/>
           </a:xfrm>
           <a:prstGeom prst="rect">
             <a:avLst/>
@@ -7222,21 +7222,21 @@
           <a:p>
             <a:pPr algn="l">
               <a:lnSpc>
-                <a:spcPct val="115000"/>
+                <a:spcPct val="112000"/>
               </a:lnSpc>
               <a:spcAft>
                 <a:spcPts val="200"/>
               </a:spcAft>
             </a:pPr>
             <a:r>
-              <a:rPr sz="1100" b="0" i="0">
+              <a:rPr sz="1050" b="0" i="0">
                 <a:solidFill>
                   <a:srgbClr val="262B33"/>
                 </a:solidFill>
                 <a:latin typeface="Meiryo"/>
                 <a:ea typeface="Meiryo"/>
               </a:rPr>
-              <a:t>利用期間制の導入 ── 必要な期間だけ利用、満了時に終了・更新</a:t>
+              <a:t>終了・見直しの柔軟化 ── あらかじめ期間を区切る制度ではなく、必要性がなくなった時点で家裁が終了できる仕組み（要確認）</a:t>
             </a:r>
           </a:p>
         </p:txBody>
@@ -7249,7 +7249,7 @@
         </p:nvSpPr>
         <p:spPr>
           <a:xfrm>
-            <a:off x="731520" y="5715000"/>
+            <a:off x="731520" y="5577840"/>
             <a:ext cx="118872" cy="118872"/>
           </a:xfrm>
           <a:prstGeom prst="rect">
@@ -7293,8 +7293,8 @@
         </p:nvSpPr>
         <p:spPr>
           <a:xfrm>
-            <a:off x="960120" y="5669280"/>
-            <a:ext cx="6858000" cy="347472"/>
+            <a:off x="960120" y="5522976"/>
+            <a:ext cx="6903720" cy="420624"/>
           </a:xfrm>
           <a:prstGeom prst="rect">
             <a:avLst/>
@@ -7309,14 +7309,14 @@
           <a:p>
             <a:pPr algn="l">
               <a:lnSpc>
-                <a:spcPct val="115000"/>
+                <a:spcPct val="112000"/>
               </a:lnSpc>
               <a:spcAft>
                 <a:spcPts val="200"/>
               </a:spcAft>
             </a:pPr>
             <a:r>
-              <a:rPr sz="1100" b="0" i="0">
+              <a:rPr sz="1050" b="0" i="0">
                 <a:solidFill>
                   <a:srgbClr val="262B33"/>
                 </a:solidFill>
@@ -7336,7 +7336,7 @@
         </p:nvSpPr>
         <p:spPr>
           <a:xfrm>
-            <a:off x="731520" y="6080760"/>
+            <a:off x="731520" y="5998464"/>
             <a:ext cx="118872" cy="118872"/>
           </a:xfrm>
           <a:prstGeom prst="rect">
@@ -7380,8 +7380,8 @@
         </p:nvSpPr>
         <p:spPr>
           <a:xfrm>
-            <a:off x="960120" y="6035040"/>
-            <a:ext cx="6858000" cy="347472"/>
+            <a:off x="960120" y="5943600"/>
+            <a:ext cx="6903720" cy="420624"/>
           </a:xfrm>
           <a:prstGeom prst="rect">
             <a:avLst/>
@@ -7396,21 +7396,21 @@
           <a:p>
             <a:pPr algn="l">
               <a:lnSpc>
-                <a:spcPct val="115000"/>
+                <a:spcPct val="112000"/>
               </a:lnSpc>
               <a:spcAft>
                 <a:spcPts val="200"/>
               </a:spcAft>
             </a:pPr>
             <a:r>
-              <a:rPr sz="1100" b="0" i="0">
+              <a:rPr sz="1050" b="0" i="0">
                 <a:solidFill>
                   <a:srgbClr val="262B33"/>
                 </a:solidFill>
                 <a:latin typeface="Meiryo"/>
                 <a:ea typeface="Meiryo"/>
               </a:rPr>
-              <a:t>後見人の交代を容易に／デジタル遺言の創設（報道）</a:t>
+              <a:t>後見人の交代を容易に ／ デジタル遺言の創設（報道ベース）</a:t>
             </a:r>
           </a:p>
         </p:txBody>
@@ -7423,8 +7423,8 @@
         </p:nvSpPr>
         <p:spPr>
           <a:xfrm>
-            <a:off x="8275320" y="2414016"/>
-            <a:ext cx="3182112" cy="3886200"/>
+            <a:off x="8275320" y="2359152"/>
+            <a:ext cx="3182112" cy="4041648"/>
           </a:xfrm>
           <a:prstGeom prst="rect">
             <a:avLst/>
@@ -7469,7 +7469,7 @@
         </p:nvSpPr>
         <p:spPr>
           <a:xfrm>
-            <a:off x="8385048" y="2459736"/>
+            <a:off x="8385048" y="2404872"/>
             <a:ext cx="1828800" cy="274320"/>
           </a:xfrm>
           <a:prstGeom prst="rect">
@@ -7512,7 +7512,7 @@
         </p:nvSpPr>
         <p:spPr>
           <a:xfrm>
-            <a:off x="8412480" y="2889504"/>
+            <a:off x="8412480" y="2834640"/>
             <a:ext cx="2907792" cy="9525"/>
           </a:xfrm>
           <a:prstGeom prst="rect">
@@ -7556,7 +7556,7 @@
         </p:nvSpPr>
         <p:spPr>
           <a:xfrm>
-            <a:off x="8412480" y="3273552"/>
+            <a:off x="8412480" y="3218688"/>
             <a:ext cx="2907792" cy="9525"/>
           </a:xfrm>
           <a:prstGeom prst="rect">
@@ -7600,7 +7600,7 @@
         </p:nvSpPr>
         <p:spPr>
           <a:xfrm>
-            <a:off x="8412480" y="3657600"/>
+            <a:off x="8412480" y="3602736"/>
             <a:ext cx="2907792" cy="9525"/>
           </a:xfrm>
           <a:prstGeom prst="rect">
@@ -7644,7 +7644,7 @@
         </p:nvSpPr>
         <p:spPr>
           <a:xfrm>
-            <a:off x="8412480" y="4041648"/>
+            <a:off x="8412480" y="3986784"/>
             <a:ext cx="2907792" cy="9525"/>
           </a:xfrm>
           <a:prstGeom prst="rect">
@@ -7688,7 +7688,7 @@
         </p:nvSpPr>
         <p:spPr>
           <a:xfrm>
-            <a:off x="8412480" y="4425696"/>
+            <a:off x="8412480" y="4370832"/>
             <a:ext cx="2907792" cy="9525"/>
           </a:xfrm>
           <a:prstGeom prst="rect">
@@ -7732,7 +7732,7 @@
         </p:nvSpPr>
         <p:spPr>
           <a:xfrm>
-            <a:off x="8412480" y="4809744"/>
+            <a:off x="8412480" y="4754880"/>
             <a:ext cx="2907792" cy="9525"/>
           </a:xfrm>
           <a:prstGeom prst="rect">
@@ -7776,7 +7776,7 @@
         </p:nvSpPr>
         <p:spPr>
           <a:xfrm>
-            <a:off x="8412480" y="5193792"/>
+            <a:off x="8412480" y="5138928"/>
             <a:ext cx="2907792" cy="9525"/>
           </a:xfrm>
           <a:prstGeom prst="rect">
@@ -7820,7 +7820,7 @@
         </p:nvSpPr>
         <p:spPr>
           <a:xfrm>
-            <a:off x="8412480" y="5577840"/>
+            <a:off x="8412480" y="5522976"/>
             <a:ext cx="2907792" cy="9525"/>
           </a:xfrm>
           <a:prstGeom prst="rect">
@@ -7864,7 +7864,7 @@
         </p:nvSpPr>
         <p:spPr>
           <a:xfrm>
-            <a:off x="8412480" y="5961888"/>
+            <a:off x="8412480" y="5907024"/>
             <a:ext cx="2907792" cy="9525"/>
           </a:xfrm>
           <a:prstGeom prst="rect">
@@ -7902,7 +7902,51 @@
       </p:sp>
       <p:sp>
         <p:nvSpPr>
-          <p:cNvPr id="44" name="TextBox 43"/>
+          <p:cNvPr id="44" name="Rectangle 43"/>
+          <p:cNvSpPr/>
+          <p:nvPr/>
+        </p:nvSpPr>
+        <p:spPr>
+          <a:xfrm>
+            <a:off x="8412480" y="6291072"/>
+            <a:ext cx="2907792" cy="9525"/>
+          </a:xfrm>
+          <a:prstGeom prst="rect">
+            <a:avLst/>
+          </a:prstGeom>
+          <a:solidFill>
+            <a:srgbClr val="E4DDC4"/>
+          </a:solidFill>
+          <a:ln>
+            <a:noFill/>
+          </a:ln>
+          <a:effectLst/>
+        </p:spPr>
+        <p:style>
+          <a:lnRef idx="1">
+            <a:schemeClr val="accent1"/>
+          </a:lnRef>
+          <a:fillRef idx="3">
+            <a:schemeClr val="accent1"/>
+          </a:fillRef>
+          <a:effectRef idx="2">
+            <a:schemeClr val="accent1"/>
+          </a:effectRef>
+          <a:fontRef idx="minor">
+            <a:schemeClr val="lt1"/>
+          </a:fontRef>
+        </p:style>
+        <p:txBody>
+          <a:bodyPr rtlCol="0" anchor="ctr"/>
+          <a:lstStyle/>
+          <a:p>
+            <a:pPr algn="ctr"/>
+          </a:p>
+        </p:txBody>
+      </p:sp>
+      <p:sp>
+        <p:nvSpPr>
+          <p:cNvPr id="45" name="TextBox 44"/>
           <p:cNvSpPr txBox="1"/>
           <p:nvPr/>
         </p:nvSpPr>
@@ -20351,7 +20395,7 @@
                 <a:latin typeface="Meiryo"/>
                 <a:ea typeface="Meiryo"/>
               </a:rPr>
-              <a:t>「期間制・終われる後見」で、いったん始めた後見を終了できる具体的な要件・手続きは。</a:t>
+              <a:t>終身制の廃止（終われる後見）で、いったん始めた後見を終了できる具体的な要件・手続きは。</a:t>
             </a:r>
           </a:p>
         </p:txBody>
@@ -38595,7 +38639,7 @@
                 <a:latin typeface="Meiryo"/>
                 <a:ea typeface="Meiryo"/>
               </a:rPr>
-              <a:t>鑑定費用：実施時のみ。多くは10万円以下</a:t>
+              <a:t>鑑定費用：実施は全体の約4%。実施時で多くは10万円以下</a:t>
             </a:r>
           </a:p>
         </p:txBody>
@@ -38829,7 +38873,7 @@
                 <a:latin typeface="Meiryo"/>
                 <a:ea typeface="Meiryo"/>
               </a:rPr>
-              <a:t>審理期間：多くは申立てから 4か月以内</a:t>
+              <a:t>審理期間：4か月以内に約94%が終局（2か月以内 約72%）</a:t>
             </a:r>
           </a:p>
           <a:p>
@@ -38919,7 +38963,7 @@
                 <a:latin typeface="Meiryo"/>
                 <a:ea typeface="Meiryo"/>
               </a:rPr>
-              <a:t>内訳：後見開始 約2.9万 / 保佐 約0.9万 / 補助 約0.3万</a:t>
+              <a:t>内訳：後見開始 約2.9万 / 保佐 約0.9万 / 補助 約0.3万 ほか</a:t>
             </a:r>
           </a:p>
           <a:p>
